--- a/deliverables/KARNADHAR_Architecture.pptx
+++ b/deliverables/KARNADHAR_Architecture.pptx
@@ -1966,7 +1966,7 @@
                 <a:ea typeface="Arial" pitchFamily="34" charset="-122"/>
                 <a:cs typeface="Arial" pitchFamily="34" charset="-120"/>
               </a:rPr>
-              <a:t>block any chokepoint AND/OR sanction any supplier</a:t>
+              <a:t>5 scenarios: block any chokepoint AND/OR sanction any supplier</a:t>
             </a:r>
             <a:endParaRPr lang="en-US" sz="1250" dirty="0"/>
           </a:p>
@@ -2073,7 +2073,7 @@
                 <a:ea typeface="Arial" pitchFamily="34" charset="-122"/>
                 <a:cs typeface="Arial" pitchFamily="34" charset="-120"/>
               </a:rPr>
-              <a:t>grade-aware LP: API · sulphur · asphaltene · desulph caps</a:t>
+              <a:t>grade-aware LP → ranked routes, shadow prices, VLCC ton-mile</a:t>
             </a:r>
             <a:endParaRPr lang="en-US" sz="1250" dirty="0"/>
           </a:p>
@@ -2471,7 +2471,7 @@
                 <a:ea typeface="Arial" pitchFamily="34" charset="-122"/>
                 <a:cs typeface="Arial" pitchFamily="34" charset="-120"/>
               </a:rPr>
-              <a:t>Economic cascade
+              <a:t>Channel-aware cascade
 </a:t>
             </a:r>
             <a:pPr indent="0" marL="0">
@@ -2489,7 +2489,7 @@
                 <a:ea typeface="Arial" pitchFamily="34" charset="-122"/>
                 <a:cs typeface="Arial" pitchFamily="34" charset="-120"/>
               </a:rPr>
-              <a:t>closure → Brent → pump → CPI/GDP → twin-deficit CAD (ORF-reviewed)</a:t>
+              <a:t>Hormuz = global shock; sanction = discount-loss; twin-deficit CAD + multi-commodity IVX</a:t>
             </a:r>
             <a:endParaRPr lang="en-US" sz="1250" dirty="0"/>
           </a:p>
@@ -2578,7 +2578,7 @@
                 <a:ea typeface="Arial" pitchFamily="34" charset="-122"/>
                 <a:cs typeface="Arial" pitchFamily="34" charset="-120"/>
               </a:rPr>
-              <a:t>Reserve coupling
+              <a:t>SPR drawdown scheduler
 </a:t>
             </a:r>
             <a:pPr indent="0" marL="0">
@@ -2596,7 +2596,7 @@
                 <a:ea typeface="Arial" pitchFamily="34" charset="-122"/>
                 <a:cs typeface="Arial" pitchFamily="34" charset="-120"/>
               </a:rPr>
-              <a:t>honest SPR runway vs voyage bridge (Strategic Reserve view)</a:t>
+              <a:t>hold / bridge / ration; runway vs voyage bridge (Strategic Reserve)</a:t>
             </a:r>
             <a:endParaRPr lang="en-US" sz="1250" dirty="0"/>
           </a:p>
@@ -2703,7 +2703,7 @@
                 <a:ea typeface="Arial" pitchFamily="34" charset="-122"/>
                 <a:cs typeface="Arial" pitchFamily="34" charset="-120"/>
               </a:rPr>
-              <a:t>35/35 falsifiable checks, exit-code gated</a:t>
+              <a:t>62/62 falsifiable checks, exit-code gated, in CI</a:t>
             </a:r>
             <a:endParaRPr lang="en-US" sz="1250" dirty="0"/>
           </a:p>
@@ -2879,7 +2879,7 @@
               <a:buNone/>
             </a:pPr>
             <a:r>
-              <a:rPr lang="en-US" sz="1300" b="1" dirty="0">
+              <a:rPr lang="en-US" sz="1250" b="1" dirty="0">
                 <a:solidFill>
                   <a:srgbClr val="E8EDF2"/>
                 </a:solidFill>
@@ -2905,9 +2905,9 @@
                 <a:ea typeface="Arial" pitchFamily="34" charset="-122"/>
                 <a:cs typeface="Arial" pitchFamily="34" charset="-120"/>
               </a:rPr>
-              <a:t>Next.js + MapLibre: live routed map, cut/alive corridors, per-refinery diets, scenario switching (~45 ms recompute)</a:t>
-            </a:r>
-            <a:endParaRPr lang="en-US" sz="1300" dirty="0"/>
+              <a:t>Next.js + MapLibre: 3D globe / 2D, animated optimizer flows, reroute deep-dive (ranked #1..N), knowledge graph, multi-commodity lens (~45 ms recompute)</a:t>
+            </a:r>
+            <a:endParaRPr lang="en-US" sz="1250" dirty="0"/>
           </a:p>
         </p:txBody>
       </p:sp>
